--- a/MECH191_metallurgy/slideDecks/pptx/MECH191_Week9_Lecture.pptx
+++ b/MECH191_metallurgy/slideDecks/pptx/MECH191_Week9_Lecture.pptx
@@ -13342,7 +13342,7 @@
         </p:spPr>
         <p:txBody>
           <a:bodyPr wrap="none" lIns="0" rIns="0" tIns="0" bIns="0">
-            <a:spAutoFit/>
+            <a:noAutofit/>
           </a:bodyPr>
           <a:lstStyle/>
           <a:p>
@@ -13353,7 +13353,7 @@
                 </a:solidFill>
                 <a:latin typeface="Calibri"/>
               </a:rPr>
-              <a:t>Metallography Lab — Module 8</a:t>
+              <a:t>Alloy Research Portfolio — Module 8</a:t>
             </a:r>
           </a:p>
         </p:txBody>
@@ -13376,7 +13376,7 @@
         </p:spPr>
         <p:txBody>
           <a:bodyPr wrap="none" lIns="0" rIns="0" tIns="0" bIns="0">
-            <a:spAutoFit/>
+            <a:noAutofit/>
           </a:bodyPr>
           <a:lstStyle/>
           <a:p>
@@ -13387,7 +13387,7 @@
                 </a:solidFill>
                 <a:latin typeface="Calibri"/>
               </a:rPr>
-              <a:t>EXAMET-5-R-600-HD  ·  50–500×</a:t>
+              <a:t>No Microscope Required</a:t>
             </a:r>
           </a:p>
         </p:txBody>
@@ -13512,7 +13512,7 @@
         </p:spPr>
         <p:txBody>
           <a:bodyPr wrap="none" lIns="0" rIns="0" tIns="0" bIns="0">
-            <a:spAutoFit/>
+            <a:noAutofit/>
           </a:bodyPr>
           <a:lstStyle/>
           <a:p>
@@ -13523,7 +13523,7 @@
                 </a:solidFill>
                 <a:latin typeface="Calibri"/>
               </a:rPr>
-              <a:t>Document grain size (ASTM E112) and inclusion rating (ASTM E45) per a </a:t>
+              <a:t>Research published ASTM E112 grain size and E45 inclusion ratings</a:t>
             </a:r>
           </a:p>
         </p:txBody>
@@ -13546,7 +13546,7 @@
         </p:spPr>
         <p:txBody>
           <a:bodyPr wrap="none" lIns="0" rIns="0" tIns="0" bIns="0">
-            <a:spAutoFit/>
+            <a:noAutofit/>
           </a:bodyPr>
           <a:lstStyle/>
           <a:p>
@@ -13557,7 +13557,7 @@
                 </a:solidFill>
                 <a:latin typeface="Calibri"/>
               </a:rPr>
-              <a:t>written QA record format.</a:t>
+              <a:t>typical for normalized 1018 steel.</a:t>
             </a:r>
           </a:p>
         </p:txBody>
@@ -13614,7 +13614,7 @@
         </p:spPr>
         <p:txBody>
           <a:bodyPr wrap="none" lIns="0" rIns="0" tIns="0" bIns="0">
-            <a:spAutoFit/>
+            <a:noAutofit/>
           </a:bodyPr>
           <a:lstStyle/>
           <a:p>
@@ -13625,7 +13625,7 @@
                 </a:solidFill>
                 <a:latin typeface="Calibri"/>
               </a:rPr>
-              <a:t>1  Observe — complete feature table</a:t>
+              <a:t>1  Research — record data &amp; sources</a:t>
             </a:r>
           </a:p>
         </p:txBody>
@@ -13648,7 +13648,7 @@
         </p:spPr>
         <p:txBody>
           <a:bodyPr wrap="none" lIns="0" rIns="0" tIns="0" bIns="0">
-            <a:spAutoFit/>
+            <a:noAutofit/>
           </a:bodyPr>
           <a:lstStyle/>
           <a:p>
@@ -13659,7 +13659,7 @@
                 </a:solidFill>
                 <a:latin typeface="Calibri"/>
               </a:rPr>
-              <a:t>2  Sketch — label magnification &amp; specimen</a:t>
+              <a:t>2  Answer — short-answer questions</a:t>
             </a:r>
           </a:p>
         </p:txBody>
@@ -13682,7 +13682,7 @@
         </p:spPr>
         <p:txBody>
           <a:bodyPr wrap="none" lIns="0" rIns="0" tIns="0" bIns="0">
-            <a:spAutoFit/>
+            <a:noAutofit/>
           </a:bodyPr>
           <a:lstStyle/>
           <a:p>
@@ -13693,7 +13693,7 @@
                 </a:solidFill>
                 <a:latin typeface="Calibri"/>
               </a:rPr>
-              <a:t>3  Answer — 4 short questions</a:t>
+              <a:t>3  Apply — critical-thinking &amp; equations</a:t>
             </a:r>
           </a:p>
         </p:txBody>
@@ -13716,7 +13716,7 @@
         </p:spPr>
         <p:txBody>
           <a:bodyPr wrap="none" lIns="0" rIns="0" tIns="0" bIns="0">
-            <a:spAutoFit/>
+            <a:noAutofit/>
           </a:bodyPr>
           <a:lstStyle/>
           <a:p>
@@ -13727,7 +13727,7 @@
                 </a:solidFill>
                 <a:latin typeface="Calibri"/>
               </a:rPr>
-              <a:t>Specimens to Check Out</a:t>
+              <a:t>Alloys of Record</a:t>
             </a:r>
           </a:p>
         </p:txBody>
@@ -13750,7 +13750,7 @@
         </p:spPr>
         <p:txBody>
           <a:bodyPr wrap="none" lIns="0" rIns="0" tIns="0" bIns="0">
-            <a:spAutoFit/>
+            <a:noAutofit/>
           </a:bodyPr>
           <a:lstStyle/>
           <a:p>
@@ -13761,7 +13761,7 @@
                 </a:solidFill>
                 <a:latin typeface="Calibri"/>
               </a:rPr>
-              <a:t>· Specimen A — 1018 steel (normalized)</a:t>
+              <a:t>· Alloy A — 1018 steel (normalized)</a:t>
             </a:r>
           </a:p>
         </p:txBody>
@@ -13784,7 +13784,7 @@
         </p:spPr>
         <p:txBody>
           <a:bodyPr wrap="none" lIns="0" rIns="0" tIns="0" bIns="0">
-            <a:spAutoFit/>
+            <a:noAutofit/>
           </a:bodyPr>
           <a:lstStyle/>
           <a:p>
@@ -13795,7 +13795,7 @@
                 </a:solidFill>
                 <a:latin typeface="Calibri"/>
               </a:rPr>
-              <a:t>How to check out the kit:</a:t>
+              <a:t>How to Complete This Module:</a:t>
             </a:r>
           </a:p>
         </p:txBody>
@@ -13818,7 +13818,7 @@
         </p:spPr>
         <p:txBody>
           <a:bodyPr wrap="none" lIns="0" rIns="0" tIns="0" bIns="0">
-            <a:spAutoFit/>
+            <a:noAutofit/>
           </a:bodyPr>
           <a:lstStyle/>
           <a:p>
@@ -13829,7 +13829,7 @@
                 </a:solidFill>
                 <a:latin typeface="Calibri"/>
               </a:rPr>
-              <a:t>1  See instructor after class today</a:t>
+              <a:t>1  Research the alloy(s) using credible sources</a:t>
             </a:r>
           </a:p>
         </p:txBody>
@@ -13852,7 +13852,7 @@
         </p:spPr>
         <p:txBody>
           <a:bodyPr wrap="none" lIns="0" rIns="0" tIns="0" bIns="0">
-            <a:spAutoFit/>
+            <a:noAutofit/>
           </a:bodyPr>
           <a:lstStyle/>
           <a:p>
@@ -13863,7 +13863,7 @@
                 </a:solidFill>
                 <a:latin typeface="Calibri"/>
               </a:rPr>
-              <a:t>2  Sign out the specimen tray</a:t>
+              <a:t>2  Record data with a source citation</a:t>
             </a:r>
           </a:p>
         </p:txBody>
@@ -13886,7 +13886,7 @@
         </p:spPr>
         <p:txBody>
           <a:bodyPr wrap="none" lIns="0" rIns="0" tIns="0" bIns="0">
-            <a:spAutoFit/>
+            <a:noAutofit/>
           </a:bodyPr>
           <a:lstStyle/>
           <a:p>
@@ -13897,7 +13897,7 @@
                 </a:solidFill>
                 <a:latin typeface="Calibri"/>
               </a:rPr>
-              <a:t>3  Use the EXAMET-5 at your convenience</a:t>
+              <a:t>3  Answer the short-answer questions</a:t>
             </a:r>
           </a:p>
         </p:txBody>
@@ -13920,7 +13920,7 @@
         </p:spPr>
         <p:txBody>
           <a:bodyPr wrap="none" lIns="0" rIns="0" tIns="0" bIns="0">
-            <a:spAutoFit/>
+            <a:noAutofit/>
           </a:bodyPr>
           <a:lstStyle/>
           <a:p>
@@ -13931,7 +13931,7 @@
                 </a:solidFill>
                 <a:latin typeface="Calibri"/>
               </a:rPr>
-              <a:t>4  Return kit before leaving class</a:t>
+              <a:t>4  Answer the critical-thinking questions</a:t>
             </a:r>
           </a:p>
         </p:txBody>
@@ -13954,7 +13954,7 @@
         </p:spPr>
         <p:txBody>
           <a:bodyPr wrap="none" lIns="0" rIns="0" tIns="0" bIns="0">
-            <a:spAutoFit/>
+            <a:noAutofit/>
           </a:bodyPr>
           <a:lstStyle/>
           <a:p>
@@ -13965,7 +13965,7 @@
                 </a:solidFill>
                 <a:latin typeface="Calibri"/>
               </a:rPr>
-              <a:t>5  Submit completed module with your portfolio</a:t>
+              <a:t>5  Keep the module with your portfolio</a:t>
             </a:r>
           </a:p>
         </p:txBody>
